--- a/decks/triple-light/triple-light_ch1_reflection.pptx
+++ b/decks/triple-light/triple-light_ch1_reflection.pptx
@@ -125,30 +125,30 @@
   <p:extLst>
     <p:ext uri="{521415D9-36F7-43E2-AB2F-B90AF26B5E84}">
       <p14:sectionLst xmlns:p14="http://schemas.microsoft.com/office/powerpoint/2010/main">
-        <p14:section name="Opening" id="{69ddb186-2d15-1e56-c9bd-c068a60f3576}">
+        <p14:section name="Opening" id="{c118068d-9377-ad75-4c8c-bf29b48c3aaf}">
           <p14:sldIdLst>
             <p14:sldId id="256"/>
           </p14:sldIdLst>
         </p14:section>
-        <p14:section name="Gate" id="{8cfcbf51-e7c3-c8ee-a03a-4ad6ca37943c}">
+        <p14:section name="Gate" id="{e9e059a5-10c0-7b05-c352-d24c03364b7e}">
           <p14:sldIdLst>
             <p14:sldId id="257"/>
             <p14:sldId id="258"/>
           </p14:sldIdLst>
         </p14:section>
-        <p14:section name="Pre-teach" id="{af07b97f-4e68-2eaf-8aba-110544b277ce}">
+        <p14:section name="Pre-teach" id="{8a9e50db-f652-3a83-60b1-28be98e7556a}">
           <p14:sldIdLst>
             <p14:sldId id="259"/>
             <p14:sldId id="260"/>
           </p14:sldIdLst>
         </p14:section>
-        <p14:section name="Read-along" id="{202caba8-305e-e0e2-5f1b-c45ca2d9f720}">
+        <p14:section name="Read-along" id="{fa73a589-2bbc-885e-c94f-026f6067c2b7}">
           <p14:sldIdLst>
             <p14:sldId id="261"/>
             <p14:sldId id="262"/>
           </p14:sldIdLst>
         </p14:section>
-        <p14:section name="Teach" id="{939598bf-9628-8c94-c48c-3a9f1c3c6992}">
+        <p14:section name="Teach" id="{900f93a9-faa4-c806-5f90-6e157b1f7bdc}">
           <p14:sldIdLst>
             <p14:sldId id="263"/>
             <p14:sldId id="264"/>
@@ -157,19 +157,19 @@
             <p14:sldId id="267"/>
           </p14:sldIdLst>
         </p14:section>
-        <p14:section name="Routes" id="{38369cdc-1c88-50b0-4efb-bd3b55018a6d}">
+        <p14:section name="Routes" id="{8ff6328d-d3f4-d0f3-981c-69a4c1c2cc59}">
           <p14:sldIdLst>
             <p14:sldId id="268"/>
             <p14:sldId id="269"/>
             <p14:sldId id="270"/>
           </p14:sldIdLst>
         </p14:section>
-        <p14:section name="Close" id="{0fb23e11-2d6d-18e5-5826-993a67ea5608}">
+        <p14:section name="Close" id="{42d76e85-90fb-51d3-4ebe-82a8b2da43e5}">
           <p14:sldIdLst>
             <p14:sldId id="271"/>
           </p14:sldIdLst>
         </p14:section>
-        <p14:section name="Answers" id="{2f3bd4c7-38be-11fa-59b3-69cab57ec777}">
+        <p14:section name="Answers" id="{bb7eb7b8-b8a3-dbf9-3d06-ece5a06bc880}">
           <p14:sldIdLst>
             <p14:sldId id="272"/>
             <p14:sldId id="273"/>
@@ -1230,7 +1230,7 @@
               <a:rPr lang="en-US" dirty="0"/>
               <a:t>Exit ticket — individual, silent, on a slip or mini-whiteboard. Recall before help: no notes, no lanes, no hints. Collect before pupils leave.
 Question: In a ray diagram of reflection, what is the normal?
-Answer: D   A line at right angles to the mirror at the point where the ray hits. The normal is drawn at 90° to the surface where the ray meets it. Both angles are measured from the normal.
+Answer: C   A line at right angles to the mirror at the point where the ray hits. The normal is drawn at 90° to the surface where the ray meets it. Both angles are measured from the normal.
 Source of this question: gate item 1 re-asked (options rotated) — this chapter has no third quick-check module.
 The ebook also holds task 3, "Smooth or rough?", for homework or the next lesson's do now.
 Sort the slips: correct → ready to move on; incorrect → start next lesson in the pre-teach group, with the read-along and the Support lane. Same destination next time.</a:t>
@@ -1504,7 +1504,7 @@
             <a:r>
               <a:rPr lang="en-US" dirty="0"/>
               <a:t>Answers — exit ticket: Exit ticket. Reveal the answer; pupils mark their own work in a different colour, then read the "why" together. Same destination for every lane, so one answer serves the whole class.
-Answer: D   A line at right angles to the mirror at the point where the ray hits
+Answer: C   A line at right angles to the mirror at the point where the ray hits
 Why: The normal is drawn at 90° to the surface where the ray meets it. Both angles are measured from the normal.
 Ask a Support pupil to explain one step, and a Stretch pupil to share their extension.</a:t>
             </a:r>
@@ -1595,7 +1595,7 @@
             <a:r>
               <a:rPr lang="en-US" dirty="0"/>
               <a:t>Do now — retrieval. Silent, no notes, no help: recall comes before any support. Give about four minutes.
-1. In a ray diagram of reflection, what is the normal?  →  A   A line at right angles to the mirror at the point where the ray hits
+1. In a ray diagram of reflection, what is the normal?  →  D   A line at right angles to the mirror at the point where the ray hits
 2. A ray hits a plane mirror with an angle of incidence of 35°. What is the angle of reflection, in degrees?  →  35 °
 3. Reflection from a rough surface that scatters light in many directions is called ___ reflection.  →  diffuse
 Circulate: who gets 3/3 (Stretch route), 2/3 (Core), 0–1 (Support)? Use this to route pupils later in the lesson.</a:t>
@@ -1687,7 +1687,7 @@
             <a:r>
               <a:rPr lang="en-US" dirty="0"/>
               <a:t>Answers — pupils mark their own in a different colour, then hands up for 3/3, 2/3, 1/3.
-1. A   A line at right angles to the mirror at the point where the ray hits. The normal is drawn at 90° to the surface where the ray meets it. Both angles are measured from the normal.
+1. D   A line at right angles to the mirror at the point where the ray hits. The normal is drawn at 90° to the surface where the ray meets it. Both angles are measured from the normal.
 2. 35 °. The law of reflection: the angle of reflection equals the angle of incidence, so it is 35°. Exact.
 3. diffuse. Diffuse reflection is scattering from a rough surface. Specular reflection is from a smooth surface, in one direction.
 Say the route each score points to: 3/3 Stretch, 2/3 Core, 0–1 Support. Pupils may choose to move up.</a:t>
@@ -8551,7 +8551,7 @@
                 <a:ea typeface="Calibri" pitchFamily="34" charset="-122"/>
                 <a:cs typeface="Calibri" pitchFamily="34" charset="-120"/>
               </a:rPr>
-              <a:t>A line drawn along the surface of the mirror</a:t>
+              <a:t>The incoming ray</a:t>
             </a:r>
             <a:endParaRPr lang="en-US" sz="2400" dirty="0"/>
           </a:p>
@@ -8588,7 +8588,7 @@
                 <a:ea typeface="Calibri" pitchFamily="34" charset="-122"/>
                 <a:cs typeface="Calibri" pitchFamily="34" charset="-120"/>
               </a:rPr>
-              <a:t>The incoming ray</a:t>
+              <a:t>A line at right angles to the mirror at the point where the ray hits</a:t>
             </a:r>
             <a:endParaRPr lang="en-US" sz="2400" dirty="0"/>
           </a:p>
@@ -8625,7 +8625,7 @@
                 <a:ea typeface="Calibri" pitchFamily="34" charset="-122"/>
                 <a:cs typeface="Calibri" pitchFamily="34" charset="-120"/>
               </a:rPr>
-              <a:t>A line at right angles to the mirror at the point where the ray hits</a:t>
+              <a:t>A line drawn along the surface of the mirror</a:t>
             </a:r>
             <a:endParaRPr lang="en-US" sz="2400" dirty="0"/>
           </a:p>
@@ -9948,7 +9948,7 @@
                 <a:ea typeface="Cambria" pitchFamily="34" charset="-122"/>
                 <a:cs typeface="Cambria" pitchFamily="34" charset="-120"/>
               </a:rPr>
-              <a:t>D   A line at right angles to the mirror at the point where the ray hits</a:t>
+              <a:t>C   A line at right angles to the mirror at the point where the ray hits</a:t>
             </a:r>
             <a:endParaRPr lang="en-US" sz="1800" dirty="0"/>
           </a:p>
@@ -10482,7 +10482,7 @@
                 <a:ea typeface="Calibri" pitchFamily="34" charset="-122"/>
                 <a:cs typeface="Calibri" pitchFamily="34" charset="-120"/>
               </a:rPr>
-              <a:t>A line at right angles to the mirror at the point where the ray hits</a:t>
+              <a:t>A line drawn along the surface of the mirror</a:t>
             </a:r>
             <a:endParaRPr lang="en-US" sz="1800" dirty="0"/>
           </a:p>
@@ -10556,7 +10556,7 @@
                 <a:ea typeface="Calibri" pitchFamily="34" charset="-122"/>
                 <a:cs typeface="Calibri" pitchFamily="34" charset="-120"/>
               </a:rPr>
-              <a:t>A line drawn along the surface of the mirror</a:t>
+              <a:t>The incoming ray</a:t>
             </a:r>
             <a:endParaRPr lang="en-US" sz="1800" dirty="0"/>
           </a:p>
@@ -10593,7 +10593,7 @@
                 <a:ea typeface="Calibri" pitchFamily="34" charset="-122"/>
                 <a:cs typeface="Calibri" pitchFamily="34" charset="-120"/>
               </a:rPr>
-              <a:t>The incoming ray</a:t>
+              <a:t>A line at right angles to the mirror at the point where the ray hits</a:t>
             </a:r>
             <a:endParaRPr lang="en-US" sz="1800" dirty="0"/>
           </a:p>
@@ -11390,7 +11390,7 @@
                 <a:ea typeface="Calibri" pitchFamily="34" charset="-122"/>
                 <a:cs typeface="Calibri" pitchFamily="34" charset="-120"/>
               </a:rPr>
-              <a:t>A   A line at right angles to the mirror at the point where the ray hits</a:t>
+              <a:t>D   A line at right angles to the mirror at the point where the ray hits</a:t>
             </a:r>
             <a:endParaRPr lang="en-US" sz="2200" dirty="0"/>
           </a:p>

--- a/decks/triple-light/triple-light_ch1_reflection.pptx
+++ b/decks/triple-light/triple-light_ch1_reflection.pptx
@@ -125,30 +125,30 @@
   <p:extLst>
     <p:ext uri="{521415D9-36F7-43E2-AB2F-B90AF26B5E84}">
       <p14:sectionLst xmlns:p14="http://schemas.microsoft.com/office/powerpoint/2010/main">
-        <p14:section name="Opening" id="{c118068d-9377-ad75-4c8c-bf29b48c3aaf}">
+        <p14:section name="Opening" id="{0796d69e-ead5-496c-ddbe-a48d50a50710}">
           <p14:sldIdLst>
             <p14:sldId id="256"/>
           </p14:sldIdLst>
         </p14:section>
-        <p14:section name="Gate" id="{e9e059a5-10c0-7b05-c352-d24c03364b7e}">
+        <p14:section name="Gate" id="{a76e6e16-612a-8e87-5c3e-f4bafbe1eb47}">
           <p14:sldIdLst>
             <p14:sldId id="257"/>
             <p14:sldId id="258"/>
           </p14:sldIdLst>
         </p14:section>
-        <p14:section name="Pre-teach" id="{8a9e50db-f652-3a83-60b1-28be98e7556a}">
+        <p14:section name="Pre-teach" id="{f086103e-2df9-e6b3-77e3-454771224e45}">
           <p14:sldIdLst>
             <p14:sldId id="259"/>
             <p14:sldId id="260"/>
           </p14:sldIdLst>
         </p14:section>
-        <p14:section name="Read-along" id="{fa73a589-2bbc-885e-c94f-026f6067c2b7}">
+        <p14:section name="Read-along" id="{e8f31340-9f4c-97c0-fb65-31d8fb8f7b9d}">
           <p14:sldIdLst>
             <p14:sldId id="261"/>
             <p14:sldId id="262"/>
           </p14:sldIdLst>
         </p14:section>
-        <p14:section name="Teach" id="{900f93a9-faa4-c806-5f90-6e157b1f7bdc}">
+        <p14:section name="Teach" id="{74e8680d-678c-f06c-a42c-786e4399d655}">
           <p14:sldIdLst>
             <p14:sldId id="263"/>
             <p14:sldId id="264"/>
@@ -157,19 +157,19 @@
             <p14:sldId id="267"/>
           </p14:sldIdLst>
         </p14:section>
-        <p14:section name="Routes" id="{8ff6328d-d3f4-d0f3-981c-69a4c1c2cc59}">
+        <p14:section name="Routes" id="{b699d34b-703e-426a-9554-50a5875d26c7}">
           <p14:sldIdLst>
             <p14:sldId id="268"/>
             <p14:sldId id="269"/>
             <p14:sldId id="270"/>
           </p14:sldIdLst>
         </p14:section>
-        <p14:section name="Close" id="{42d76e85-90fb-51d3-4ebe-82a8b2da43e5}">
+        <p14:section name="Close" id="{3e0fc1af-a502-aded-14cb-4cb9dbed0c54}">
           <p14:sldIdLst>
             <p14:sldId id="271"/>
           </p14:sldIdLst>
         </p14:section>
-        <p14:section name="Answers" id="{bb7eb7b8-b8a3-dbf9-3d06-ece5a06bc880}">
+        <p14:section name="Answers" id="{e17bb3ad-bc3c-9cec-1443-9d8bf479b96b}">
           <p14:sldIdLst>
             <p14:sldId id="272"/>
             <p14:sldId id="273"/>
